--- a/viewers/pptx/e2e/fixtures/field-substitution.pptx
+++ b/viewers/pptx/e2e/fixtures/field-substitution.pptx
@@ -365,7 +365,7 @@
           <a:spcPct val="20000"/>
         </a:spcBef>
         <a:buFont typeface="Arial" panose="020B0604020202020204" pitchFamily="34" charset="0"/>
-        <a:buChar char="&amp;#x2022;"/>
+        <a:buChar char="•"/>
         <a:defRPr sz="3200" kern="1200">
           <a:solidFill>
             <a:schemeClr val="tx1"/>

--- a/viewers/pptx/e2e/fixtures/field-substitution.pptx
+++ b/viewers/pptx/e2e/fixtures/field-substitution.pptx
@@ -404,7 +404,7 @@
       </p:grpSpPr>
       <p:sp>
         <p:nvSpPr>
-          <p:cNvPr id="3" name="TextBox 1"/>
+          <p:cNvPr id="2" name="TextBox 1"/>
           <p:cNvSpPr txBox="1"/>
           <p:nvPr>
             <p:ph type="title"/>
@@ -434,7 +434,7 @@
       </p:sp>
       <p:sp>
         <p:nvSpPr>
-          <p:cNvPr id="2" name="TextBox 2"/>
+          <p:cNvPr id="3" name="TextBox 2"/>
           <p:cNvSpPr txBox="1"/>
           <p:nvPr/>
         </p:nvSpPr>
@@ -499,7 +499,7 @@
       </p:grpSpPr>
       <p:sp>
         <p:nvSpPr>
-          <p:cNvPr id="3" name="TextBox 3"/>
+          <p:cNvPr id="2" name="TextBox 3"/>
           <p:cNvSpPr txBox="1"/>
           <p:nvPr>
             <p:ph type="title"/>
@@ -529,7 +529,7 @@
       </p:sp>
       <p:sp>
         <p:nvSpPr>
-          <p:cNvPr id="4" name="TextBox 4"/>
+          <p:cNvPr id="3" name="TextBox 4"/>
           <p:cNvSpPr txBox="1"/>
           <p:nvPr/>
         </p:nvSpPr>
@@ -594,7 +594,7 @@
       </p:grpSpPr>
       <p:sp>
         <p:nvSpPr>
-          <p:cNvPr id="5" name="TextBox 5"/>
+          <p:cNvPr id="2" name="TextBox 5"/>
           <p:cNvSpPr txBox="1"/>
           <p:nvPr>
             <p:ph type="title"/>
@@ -624,7 +624,7 @@
       </p:sp>
       <p:sp>
         <p:nvSpPr>
-          <p:cNvPr id="6" name="TextBox 6"/>
+          <p:cNvPr id="3" name="TextBox 6"/>
           <p:cNvSpPr txBox="1"/>
           <p:nvPr/>
         </p:nvSpPr>
@@ -689,7 +689,7 @@
       </p:grpSpPr>
       <p:sp>
         <p:nvSpPr>
-          <p:cNvPr id="7" name="TextBox 7"/>
+          <p:cNvPr id="2" name="TextBox 7"/>
           <p:cNvSpPr txBox="1"/>
           <p:nvPr>
             <p:ph type="title"/>
@@ -719,7 +719,7 @@
       </p:sp>
       <p:sp>
         <p:nvSpPr>
-          <p:cNvPr id="8" name="TextBox 8"/>
+          <p:cNvPr id="3" name="TextBox 8"/>
           <p:cNvSpPr txBox="1"/>
           <p:nvPr/>
         </p:nvSpPr>

--- a/viewers/pptx/e2e/fixtures/field-substitution.pptx
+++ b/viewers/pptx/e2e/fixtures/field-substitution.pptx
@@ -423,12 +423,10 @@
           <a:bodyPr wrap="square"/>
           <a:lstStyle/>
           <a:p>
-            <a:pPr/>
-            <a:r>
-              <a:rPr lang="en-US" dirty="0" sz="2700" b="1"/>
+            <a:r>
+              <a:rPr lang="en-US" sz="2700" b="1" dirty="0"/>
               <a:t>Alpha</a:t>
             </a:r>
-            <a:endParaRPr lang="en-US"/>
           </a:p>
         </p:txBody>
       </p:sp>
@@ -451,7 +449,6 @@
           <a:bodyPr wrap="square"/>
           <a:lstStyle/>
           <a:p>
-            <a:pPr/>
             <a:r>
               <a:rPr lang="en-US" sz="2000" dirty="0"/>
               <a:t>Slide </a:t>
@@ -468,7 +465,6 @@
               <a:rPr lang="en-US" sz="2000" dirty="0"/>
               <a:t>Title</a:t>
             </a:fld>
-            <a:endParaRPr lang="en-US"/>
           </a:p>
         </p:txBody>
       </p:sp>
@@ -518,12 +514,10 @@
           <a:bodyPr wrap="square"/>
           <a:lstStyle/>
           <a:p>
-            <a:pPr/>
-            <a:r>
-              <a:rPr lang="en-US" dirty="0" sz="2700" b="1"/>
+            <a:r>
+              <a:rPr lang="en-US" sz="2700" b="1" dirty="0"/>
               <a:t>Beta</a:t>
             </a:r>
-            <a:endParaRPr lang="en-US"/>
           </a:p>
         </p:txBody>
       </p:sp>
@@ -546,7 +540,6 @@
           <a:bodyPr wrap="square"/>
           <a:lstStyle/>
           <a:p>
-            <a:pPr/>
             <a:r>
               <a:rPr lang="en-US" sz="2000" dirty="0"/>
               <a:t>Slide </a:t>
@@ -563,7 +556,6 @@
               <a:rPr lang="en-US" sz="2000" dirty="0"/>
               <a:t>Title</a:t>
             </a:fld>
-            <a:endParaRPr lang="en-US"/>
           </a:p>
         </p:txBody>
       </p:sp>
@@ -613,12 +605,10 @@
           <a:bodyPr wrap="square"/>
           <a:lstStyle/>
           <a:p>
-            <a:pPr/>
-            <a:r>
-              <a:rPr lang="en-US" dirty="0" sz="2700" b="1"/>
+            <a:r>
+              <a:rPr lang="en-US" sz="2700" b="1" dirty="0"/>
               <a:t>Gamma</a:t>
             </a:r>
-            <a:endParaRPr lang="en-US"/>
           </a:p>
         </p:txBody>
       </p:sp>
@@ -641,7 +631,6 @@
           <a:bodyPr wrap="square"/>
           <a:lstStyle/>
           <a:p>
-            <a:pPr/>
             <a:r>
               <a:rPr lang="en-US" sz="2000" dirty="0"/>
               <a:t>Slide </a:t>
@@ -658,7 +647,6 @@
               <a:rPr lang="en-US" sz="2000" dirty="0"/>
               <a:t>Title</a:t>
             </a:fld>
-            <a:endParaRPr lang="en-US"/>
           </a:p>
         </p:txBody>
       </p:sp>
@@ -708,12 +696,10 @@
           <a:bodyPr wrap="square"/>
           <a:lstStyle/>
           <a:p>
-            <a:pPr/>
-            <a:r>
-              <a:rPr lang="en-US" dirty="0" sz="2700" b="1"/>
+            <a:r>
+              <a:rPr lang="en-US" sz="2700" b="1" dirty="0"/>
               <a:t>Delta</a:t>
             </a:r>
-            <a:endParaRPr lang="en-US"/>
           </a:p>
         </p:txBody>
       </p:sp>
@@ -736,7 +722,6 @@
           <a:bodyPr wrap="square"/>
           <a:lstStyle/>
           <a:p>
-            <a:pPr/>
             <a:r>
               <a:rPr lang="en-US" sz="2000" dirty="0"/>
               <a:t>Slide </a:t>
@@ -753,7 +738,6 @@
               <a:rPr lang="en-US" sz="2000" dirty="0"/>
               <a:t>Title</a:t>
             </a:fld>
-            <a:endParaRPr lang="en-US"/>
           </a:p>
         </p:txBody>
       </p:sp>
